--- a/DBTUNING/ch18_성능을위한DB구성/ch18_성능을위한DB구성.pptx
+++ b/DBTUNING/ch18_성능을위한DB구성/ch18_성능을위한DB구성.pptx
@@ -5457,7 +5457,7 @@
                 <a:ea typeface="맑은 고딕"/>
                 <a:cs typeface="맑은 고딕"/>
               </a:rPr>
-              <a:t>제4장</a:t>
+              <a:t>제ch18</a:t>
             </a:r>
           </a:p>
         </p:txBody>
@@ -9223,7 +9223,7 @@
                 <a:ea typeface="맑은 고딕"/>
                 <a:cs typeface="맑은 고딕"/>
               </a:rPr>
-              <a:t>•  PGA 작업영역 초과 시 임시 TS로 스필(1-pass/multi-pass, 19장)</a:t>
+              <a:t>•  PGA 작업영역 초과 시 임시 TS로 스필(1-pass/multi-pass, ch33)</a:t>
             </a:r>
           </a:p>
           <a:p>

--- a/DBTUNING/ch18_성능을위한DB구성/ch18_성능을위한DB구성.pptx
+++ b/DBTUNING/ch18_성능을위한DB구성/ch18_성능을위한DB구성.pptx
@@ -5457,7 +5457,7 @@
                 <a:ea typeface="맑은 고딕"/>
                 <a:cs typeface="맑은 고딕"/>
               </a:rPr>
-              <a:t>제ch18</a:t>
+              <a:t>ch18</a:t>
             </a:r>
           </a:p>
         </p:txBody>

--- a/DBTUNING/ch18_성능을위한DB구성/ch18_성능을위한DB구성.pptx
+++ b/DBTUNING/ch18_성능을위한DB구성/ch18_성능을위한DB구성.pptx
@@ -6272,7 +6272,7 @@
                 <a:ea typeface="맑은 고딕"/>
                 <a:cs typeface="맑은 고딕"/>
               </a:rPr>
-              <a:t>4.4</a:t>
+              <a:t>18.4</a:t>
             </a:r>
           </a:p>
         </p:txBody>
@@ -8858,7 +8858,7 @@
                 <a:ea typeface="맑은 고딕"/>
                 <a:cs typeface="맑은 고딕"/>
               </a:rPr>
-              <a:t>4.5</a:t>
+              <a:t>18.5</a:t>
             </a:r>
           </a:p>
         </p:txBody>
@@ -10020,7 +10020,7 @@
                 <a:ea typeface="맑은 고딕"/>
                 <a:cs typeface="맑은 고딕"/>
               </a:rPr>
-              <a:t>4.6</a:t>
+              <a:t>18.6</a:t>
             </a:r>
           </a:p>
         </p:txBody>
@@ -11056,7 +11056,7 @@
                 <a:ea typeface="맑은 고딕"/>
                 <a:cs typeface="맑은 고딕"/>
               </a:rPr>
-              <a:t>4.7</a:t>
+              <a:t>18.7</a:t>
             </a:r>
           </a:p>
         </p:txBody>
@@ -11619,7 +11619,7 @@
                 <a:ea typeface="맑은 고딕"/>
                 <a:cs typeface="맑은 고딕"/>
               </a:rPr>
-              <a:t>•  4.2  초기 인스턴스 구성 — 무엇을 처음에 정하는가</a:t>
+              <a:t>•  18.2  초기 인스턴스 구성 — 무엇을 처음에 정하는가</a:t>
             </a:r>
           </a:p>
           <a:p>
@@ -11637,7 +11637,7 @@
                 <a:ea typeface="맑은 고딕"/>
                 <a:cs typeface="맑은 고딕"/>
               </a:rPr>
-              <a:t>•  4.3  성능에 영향을 주는 초기화 파라미터</a:t>
+              <a:t>•  18.3  성능에 영향을 주는 초기화 파라미터</a:t>
             </a:r>
           </a:p>
           <a:p>
@@ -11655,7 +11655,7 @@
                 <a:ea typeface="맑은 고딕"/>
                 <a:cs typeface="맑은 고딕"/>
               </a:rPr>
-              <a:t>•  4.4  Undo 보존과 ORA-01555 — 읽기 일관성의 값</a:t>
+              <a:t>•  18.4  Undo 보존과 ORA-01555 — 읽기 일관성의 값</a:t>
             </a:r>
           </a:p>
           <a:p>
@@ -11673,7 +11673,7 @@
                 <a:ea typeface="맑은 고딕"/>
                 <a:cs typeface="맑은 고딕"/>
               </a:rPr>
-              <a:t>•  4.5  임시 테이블스페이스와 ORA-01652 — 정렬이 흘러넘칠 때</a:t>
+              <a:t>•  18.5  임시 테이블스페이스와 ORA-01652 — 정렬이 흘러넘칠 때</a:t>
             </a:r>
           </a:p>
           <a:p>
@@ -11691,7 +11691,7 @@
                 <a:ea typeface="맑은 고딕"/>
                 <a:cs typeface="맑은 고딕"/>
               </a:rPr>
-              <a:t>•  4.6  전용 서버와 공유 서버 — 프로세스와 메모리의 선택</a:t>
+              <a:t>•  18.6  전용 서버와 공유 서버 — 프로세스와 메모리의 선택</a:t>
             </a:r>
           </a:p>
           <a:p>
@@ -11709,7 +11709,7 @@
                 <a:ea typeface="맑은 고딕"/>
                 <a:cs typeface="맑은 고딕"/>
               </a:rPr>
-              <a:t>•  4.7  블록 크기와 행 이주 — 한 블록에 행이 안 들어갈 때</a:t>
+              <a:t>•  18.7  블록 크기와 행 이주 — 한 블록에 행이 안 들어갈 때</a:t>
             </a:r>
           </a:p>
           <a:p>
@@ -12989,7 +12989,7 @@
                 <a:ea typeface="Consolas"/>
                 <a:cs typeface="Consolas"/>
               </a:rPr>
-              <a:t>UNDOTBS1                 380          1     &lt;- ORA-01555 (4.4)</a:t>
+              <a:t>UNDOTBS1                 380          1     &lt;- ORA-01555 (18.4)</a:t>
             </a:r>
           </a:p>
           <a:p>
@@ -13025,7 +13025,7 @@
                 <a:ea typeface="Consolas"/>
                 <a:cs typeface="Consolas"/>
               </a:rPr>
-              <a:t>TEMP  (temp file)         20          1     &lt;- ORA-01652 (4.5)</a:t>
+              <a:t>TEMP  (temp file)         20          1     &lt;- ORA-01652 (18.5)</a:t>
             </a:r>
           </a:p>
         </p:txBody>
@@ -14105,7 +14105,7 @@
                 <a:ea typeface="맑은 고딕"/>
                 <a:cs typeface="맑은 고딕"/>
               </a:rPr>
-              <a:t>4.2</a:t>
+              <a:t>18.2</a:t>
             </a:r>
           </a:p>
         </p:txBody>
@@ -14884,7 +14884,7 @@
                 <a:ea typeface="맑은 고딕"/>
                 <a:cs typeface="맑은 고딕"/>
               </a:rPr>
-              <a:t>4.3</a:t>
+              <a:t>18.3</a:t>
             </a:r>
           </a:p>
         </p:txBody>
